--- a/slides/03-4-ClosestPair.pptx
+++ b/slides/03-4-ClosestPair.pptx
@@ -12972,7 +12972,7 @@
             <a:pPr algn="ctr"/>
             <a:r>
               <a:rPr lang="en-US" dirty="0"/>
-              <a:t>Mark Floryan</a:t>
+              <a:t>Mark Floryan and Aaron Bloomfield</a:t>
             </a:r>
           </a:p>
         </p:txBody>
@@ -17360,8 +17360,8 @@
           </a:p>
         </p:txBody>
       </p:sp>
-      <mc:AlternateContent xmlns:mc="http://schemas.openxmlformats.org/markup-compatibility/2006">
-        <mc:Choice xmlns:a14="http://schemas.microsoft.com/office/drawing/2010/main" Requires="a14">
+      <mc:AlternateContent xmlns:mc="http://schemas.openxmlformats.org/markup-compatibility/2006" xmlns:a14="http://schemas.microsoft.com/office/drawing/2010/main">
+        <mc:Choice Requires="a14">
           <p:sp>
             <p:nvSpPr>
               <p:cNvPr id="26" name="TextBox 25">
@@ -17467,7 +17467,7 @@
             </p:txBody>
           </p:sp>
         </mc:Choice>
-        <mc:Fallback>
+        <mc:Fallback xmlns="">
           <p:sp>
             <p:nvSpPr>
               <p:cNvPr id="26" name="TextBox 25">
@@ -19267,8 +19267,8 @@
           </a:p>
         </p:txBody>
       </p:sp>
-      <mc:AlternateContent xmlns:mc="http://schemas.openxmlformats.org/markup-compatibility/2006">
-        <mc:Choice xmlns:a14="http://schemas.microsoft.com/office/drawing/2010/main" Requires="a14">
+      <mc:AlternateContent xmlns:mc="http://schemas.openxmlformats.org/markup-compatibility/2006" xmlns:a14="http://schemas.microsoft.com/office/drawing/2010/main">
+        <mc:Choice Requires="a14">
           <p:sp>
             <p:nvSpPr>
               <p:cNvPr id="26" name="TextBox 25">
@@ -19374,7 +19374,7 @@
             </p:txBody>
           </p:sp>
         </mc:Choice>
-        <mc:Fallback>
+        <mc:Fallback xmlns="">
           <p:sp>
             <p:nvSpPr>
               <p:cNvPr id="26" name="TextBox 25">
@@ -20566,7 +20566,7 @@
             </p:nvSpPr>
             <p:spPr>
               <a:xfrm>
-                <a:off x="2068717" y="5793153"/>
+                <a:off x="2196299" y="5808626"/>
                 <a:ext cx="3349782" cy="646331"/>
               </a:xfrm>
               <a:prstGeom prst="rect">
@@ -20581,7 +20581,14 @@
               <a:lstStyle/>
               <a:p>
                 <a:r>
-                  <a:rPr lang="en-US" dirty="0"/>
+                  <a:rPr lang="en-US" dirty="0">
+                    <a:solidFill>
+                      <a:schemeClr val="accent4">
+                        <a:lumMod val="60000"/>
+                        <a:lumOff val="40000"/>
+                      </a:schemeClr>
+                    </a:solidFill>
+                  </a:rPr>
                   <a:t>Cannot sort here, that would be </a:t>
                 </a:r>
                 <a14:m>
@@ -20591,6 +20598,12 @@
                         <m:sty m:val="p"/>
                       </m:rPr>
                       <a:rPr lang="en-US" b="0" i="0" smtClean="0">
+                        <a:solidFill>
+                          <a:schemeClr val="accent4">
+                            <a:lumMod val="60000"/>
+                            <a:lumOff val="40000"/>
+                          </a:schemeClr>
+                        </a:solidFill>
                         <a:latin typeface="Cambria Math" panose="02040503050406030204" pitchFamily="18" charset="0"/>
                       </a:rPr>
                       <m:t>Θ</m:t>
@@ -20598,7 +20611,13 @@
                     <m:d>
                       <m:dPr>
                         <m:ctrlPr>
-                          <a:rPr lang="en-US" b="0" i="0" smtClean="0">
+                          <a:rPr lang="en-US" b="0" i="1" smtClean="0">
+                            <a:solidFill>
+                              <a:schemeClr val="accent4">
+                                <a:lumMod val="60000"/>
+                                <a:lumOff val="40000"/>
+                              </a:schemeClr>
+                            </a:solidFill>
                             <a:latin typeface="Cambria Math" panose="02040503050406030204" pitchFamily="18" charset="0"/>
                           </a:rPr>
                         </m:ctrlPr>
@@ -20609,12 +20628,24 @@
                             <m:sty m:val="p"/>
                           </m:rPr>
                           <a:rPr lang="en-US" b="0" i="0" smtClean="0">
+                            <a:solidFill>
+                              <a:schemeClr val="accent4">
+                                <a:lumMod val="60000"/>
+                                <a:lumOff val="40000"/>
+                              </a:schemeClr>
+                            </a:solidFill>
                             <a:latin typeface="Cambria Math" panose="02040503050406030204" pitchFamily="18" charset="0"/>
                           </a:rPr>
                           <m:t>n</m:t>
                         </m:r>
                         <m:r>
                           <a:rPr lang="en-US" b="0" i="0" smtClean="0">
+                            <a:solidFill>
+                              <a:schemeClr val="accent4">
+                                <a:lumMod val="60000"/>
+                                <a:lumOff val="40000"/>
+                              </a:schemeClr>
+                            </a:solidFill>
                             <a:latin typeface="Cambria Math" panose="02040503050406030204" pitchFamily="18" charset="0"/>
                           </a:rPr>
                           <m:t> </m:t>
@@ -20624,12 +20655,24 @@
                             <m:sty m:val="p"/>
                           </m:rPr>
                           <a:rPr lang="en-US" b="0" i="0" smtClean="0">
+                            <a:solidFill>
+                              <a:schemeClr val="accent4">
+                                <a:lumMod val="60000"/>
+                                <a:lumOff val="40000"/>
+                              </a:schemeClr>
+                            </a:solidFill>
                             <a:latin typeface="Cambria Math" panose="02040503050406030204" pitchFamily="18" charset="0"/>
                           </a:rPr>
                           <m:t>log</m:t>
                         </m:r>
                         <m:r>
                           <a:rPr lang="en-US" b="0" i="0" smtClean="0">
+                            <a:solidFill>
+                              <a:schemeClr val="accent4">
+                                <a:lumMod val="60000"/>
+                                <a:lumOff val="40000"/>
+                              </a:schemeClr>
+                            </a:solidFill>
                             <a:latin typeface="Cambria Math" panose="02040503050406030204" pitchFamily="18" charset="0"/>
                           </a:rPr>
                           <m:t> </m:t>
@@ -20639,6 +20682,12 @@
                             <m:sty m:val="p"/>
                           </m:rPr>
                           <a:rPr lang="en-US" b="0" i="0" smtClean="0">
+                            <a:solidFill>
+                              <a:schemeClr val="accent4">
+                                <a:lumMod val="60000"/>
+                                <a:lumOff val="40000"/>
+                              </a:schemeClr>
+                            </a:solidFill>
                             <a:latin typeface="Cambria Math" panose="02040503050406030204" pitchFamily="18" charset="0"/>
                           </a:rPr>
                           <m:t>n</m:t>
@@ -20648,7 +20697,14 @@
                   </m:oMath>
                 </a14:m>
                 <a:r>
-                  <a:rPr lang="en-US" dirty="0"/>
+                  <a:rPr lang="en-US" dirty="0">
+                    <a:solidFill>
+                      <a:schemeClr val="accent4">
+                        <a:lumMod val="60000"/>
+                        <a:lumOff val="40000"/>
+                      </a:schemeClr>
+                    </a:solidFill>
+                  </a:rPr>
                   <a:t>. More on that later.</a:t>
                 </a:r>
               </a:p>
@@ -20672,7 +20728,7 @@
             </p:nvSpPr>
             <p:spPr>
               <a:xfrm>
-                <a:off x="2068717" y="5793153"/>
+                <a:off x="2196299" y="5808626"/>
                 <a:ext cx="3349782" cy="646331"/>
               </a:xfrm>
               <a:prstGeom prst="rect">
@@ -20681,7 +20737,7 @@
               <a:blipFill>
                 <a:blip r:embed="rId7"/>
                 <a:stretch>
-                  <a:fillRect l="-1509" t="-3922" b="-17647"/>
+                  <a:fillRect l="-1509" t="-3846" b="-13462"/>
                 </a:stretch>
               </a:blipFill>
             </p:spPr>
@@ -21380,8 +21436,8 @@
           </a:p>
         </p:txBody>
       </p:sp>
-      <mc:AlternateContent xmlns:mc="http://schemas.openxmlformats.org/markup-compatibility/2006">
-        <mc:Choice xmlns:a14="http://schemas.microsoft.com/office/drawing/2010/main" Requires="a14">
+      <mc:AlternateContent xmlns:mc="http://schemas.openxmlformats.org/markup-compatibility/2006" xmlns:a14="http://schemas.microsoft.com/office/drawing/2010/main">
+        <mc:Choice Requires="a14">
           <p:sp>
             <p:nvSpPr>
               <p:cNvPr id="26" name="TextBox 25">
@@ -21478,7 +21534,7 @@
             </p:txBody>
           </p:sp>
         </mc:Choice>
-        <mc:Fallback>
+        <mc:Fallback xmlns="">
           <p:sp>
             <p:nvSpPr>
               <p:cNvPr id="26" name="TextBox 25">
@@ -23051,8 +23107,8 @@
           </a:p>
         </p:txBody>
       </p:sp>
-      <mc:AlternateContent xmlns:mc="http://schemas.openxmlformats.org/markup-compatibility/2006">
-        <mc:Choice xmlns:a14="http://schemas.microsoft.com/office/drawing/2010/main" Requires="a14">
+      <mc:AlternateContent xmlns:mc="http://schemas.openxmlformats.org/markup-compatibility/2006" xmlns:a14="http://schemas.microsoft.com/office/drawing/2010/main">
+        <mc:Choice Requires="a14">
           <p:sp>
             <p:nvSpPr>
               <p:cNvPr id="26" name="TextBox 25">
@@ -23149,7 +23205,7 @@
             </p:txBody>
           </p:sp>
         </mc:Choice>
-        <mc:Fallback>
+        <mc:Fallback xmlns="">
           <p:sp>
             <p:nvSpPr>
               <p:cNvPr id="26" name="TextBox 25">
@@ -24778,8 +24834,8 @@
           </a:p>
         </p:txBody>
       </p:sp>
-      <mc:AlternateContent xmlns:mc="http://schemas.openxmlformats.org/markup-compatibility/2006">
-        <mc:Choice xmlns:a14="http://schemas.microsoft.com/office/drawing/2010/main" Requires="a14">
+      <mc:AlternateContent xmlns:mc="http://schemas.openxmlformats.org/markup-compatibility/2006" xmlns:a14="http://schemas.microsoft.com/office/drawing/2010/main">
+        <mc:Choice Requires="a14">
           <p:sp>
             <p:nvSpPr>
               <p:cNvPr id="26" name="TextBox 25">
@@ -24876,7 +24932,7 @@
             </p:txBody>
           </p:sp>
         </mc:Choice>
-        <mc:Fallback>
+        <mc:Fallback xmlns="">
           <p:sp>
             <p:nvSpPr>
               <p:cNvPr id="26" name="TextBox 25">
@@ -26648,8 +26704,8 @@
           </a:p>
         </p:txBody>
       </p:sp>
-      <mc:AlternateContent xmlns:mc="http://schemas.openxmlformats.org/markup-compatibility/2006">
-        <mc:Choice xmlns:a14="http://schemas.microsoft.com/office/drawing/2010/main" Requires="a14">
+      <mc:AlternateContent xmlns:mc="http://schemas.openxmlformats.org/markup-compatibility/2006" xmlns:a14="http://schemas.microsoft.com/office/drawing/2010/main">
+        <mc:Choice Requires="a14">
           <p:sp>
             <p:nvSpPr>
               <p:cNvPr id="26" name="TextBox 25">
@@ -26746,7 +26802,7 @@
             </p:txBody>
           </p:sp>
         </mc:Choice>
-        <mc:Fallback>
+        <mc:Fallback xmlns="">
           <p:sp>
             <p:nvSpPr>
               <p:cNvPr id="26" name="TextBox 25">
@@ -28640,8 +28696,8 @@
           </a:p>
         </p:txBody>
       </p:sp>
-      <mc:AlternateContent xmlns:mc="http://schemas.openxmlformats.org/markup-compatibility/2006">
-        <mc:Choice xmlns:a14="http://schemas.microsoft.com/office/drawing/2010/main" Requires="a14">
+      <mc:AlternateContent xmlns:mc="http://schemas.openxmlformats.org/markup-compatibility/2006" xmlns:a14="http://schemas.microsoft.com/office/drawing/2010/main">
+        <mc:Choice Requires="a14">
           <p:sp>
             <p:nvSpPr>
               <p:cNvPr id="26" name="TextBox 25">
@@ -28792,7 +28848,7 @@
             </p:txBody>
           </p:sp>
         </mc:Choice>
-        <mc:Fallback>
+        <mc:Fallback xmlns="">
           <p:sp>
             <p:nvSpPr>
               <p:cNvPr id="26" name="TextBox 25">
@@ -33324,8 +33380,8 @@
           </p:sp>
         </mc:Fallback>
       </mc:AlternateContent>
-      <mc:AlternateContent xmlns:mc="http://schemas.openxmlformats.org/markup-compatibility/2006" xmlns:a14="http://schemas.microsoft.com/office/drawing/2010/main">
-        <mc:Choice Requires="a14">
+      <mc:AlternateContent xmlns:mc="http://schemas.openxmlformats.org/markup-compatibility/2006">
+        <mc:Choice xmlns:a14="http://schemas.microsoft.com/office/drawing/2010/main" Requires="a14">
           <p:sp>
             <p:nvSpPr>
               <p:cNvPr id="11" name="TextBox 10">
@@ -33340,7 +33396,7 @@
             </p:nvSpPr>
             <p:spPr>
               <a:xfrm>
-                <a:off x="5363211" y="4562043"/>
+                <a:off x="5363211" y="4421367"/>
                 <a:ext cx="810350" cy="415498"/>
               </a:xfrm>
               <a:prstGeom prst="rect">
@@ -33408,7 +33464,7 @@
             </p:txBody>
           </p:sp>
         </mc:Choice>
-        <mc:Fallback xmlns="">
+        <mc:Fallback>
           <p:sp>
             <p:nvSpPr>
               <p:cNvPr id="11" name="TextBox 10">
@@ -33425,7 +33481,7 @@
             </p:nvSpPr>
             <p:spPr>
               <a:xfrm>
-                <a:off x="5363211" y="4562043"/>
+                <a:off x="5363211" y="4421367"/>
                 <a:ext cx="810350" cy="415498"/>
               </a:xfrm>
               <a:prstGeom prst="rect">
@@ -33453,8 +33509,8 @@
           </p:sp>
         </mc:Fallback>
       </mc:AlternateContent>
-      <mc:AlternateContent xmlns:mc="http://schemas.openxmlformats.org/markup-compatibility/2006" xmlns:a14="http://schemas.microsoft.com/office/drawing/2010/main">
-        <mc:Choice Requires="a14">
+      <mc:AlternateContent xmlns:mc="http://schemas.openxmlformats.org/markup-compatibility/2006">
+        <mc:Choice xmlns:a14="http://schemas.microsoft.com/office/drawing/2010/main" Requires="a14">
           <p:sp>
             <p:nvSpPr>
               <p:cNvPr id="13" name="TextBox 12">
@@ -33469,7 +33525,7 @@
             </p:nvSpPr>
             <p:spPr>
               <a:xfrm>
-                <a:off x="5368375" y="5196943"/>
+                <a:off x="5368375" y="5376696"/>
                 <a:ext cx="800925" cy="415498"/>
               </a:xfrm>
               <a:prstGeom prst="rect">
@@ -33537,7 +33593,7 @@
             </p:txBody>
           </p:sp>
         </mc:Choice>
-        <mc:Fallback xmlns="">
+        <mc:Fallback>
           <p:sp>
             <p:nvSpPr>
               <p:cNvPr id="13" name="TextBox 12">
@@ -33554,7 +33610,7 @@
             </p:nvSpPr>
             <p:spPr>
               <a:xfrm>
-                <a:off x="5368375" y="5196943"/>
+                <a:off x="5368375" y="5376696"/>
                 <a:ext cx="800925" cy="415498"/>
               </a:xfrm>
               <a:prstGeom prst="rect">
@@ -34407,8 +34463,8 @@
           </p:sp>
         </mc:Fallback>
       </mc:AlternateContent>
-      <mc:AlternateContent xmlns:mc="http://schemas.openxmlformats.org/markup-compatibility/2006" xmlns:a14="http://schemas.microsoft.com/office/drawing/2010/main">
-        <mc:Choice Requires="a14">
+      <mc:AlternateContent xmlns:mc="http://schemas.openxmlformats.org/markup-compatibility/2006">
+        <mc:Choice xmlns:a14="http://schemas.microsoft.com/office/drawing/2010/main" Requires="a14">
           <p:sp>
             <p:nvSpPr>
               <p:cNvPr id="20" name="TextBox 19">
@@ -34423,8 +34479,8 @@
             </p:nvSpPr>
             <p:spPr>
               <a:xfrm>
-                <a:off x="6496050" y="1997773"/>
-                <a:ext cx="3886200" cy="3785652"/>
+                <a:off x="6496050" y="1935251"/>
+                <a:ext cx="3886200" cy="4016484"/>
               </a:xfrm>
               <a:prstGeom prst="rect">
                 <a:avLst/>
@@ -34566,6 +34622,16 @@
                   <a:buChar char="•"/>
                 </a:pPr>
                 <a:r>
+                  <a:rPr lang="en-US" sz="1500" dirty="0"/>
+                  <a:t>Merge sorted-y lists together to return</a:t>
+                </a:r>
+              </a:p>
+              <a:p>
+                <a:pPr marL="257175" indent="-257175">
+                  <a:buFont typeface="Arial" panose="020B0604020202020204" pitchFamily="34" charset="0"/>
+                  <a:buChar char="•"/>
+                </a:pPr>
+                <a:r>
                   <a:rPr lang="en-US" sz="1500" dirty="0">
                     <a:solidFill>
                       <a:schemeClr val="tx1">
@@ -34579,7 +34645,7 @@
             </p:txBody>
           </p:sp>
         </mc:Choice>
-        <mc:Fallback xmlns="">
+        <mc:Fallback>
           <p:sp>
             <p:nvSpPr>
               <p:cNvPr id="20" name="TextBox 19">
@@ -34596,8 +34662,8 @@
             </p:nvSpPr>
             <p:spPr>
               <a:xfrm>
-                <a:off x="6496050" y="1997773"/>
-                <a:ext cx="3886200" cy="3785652"/>
+                <a:off x="6496050" y="1935251"/>
+                <a:ext cx="3886200" cy="4016484"/>
               </a:xfrm>
               <a:prstGeom prst="rect">
                 <a:avLst/>
@@ -34605,7 +34671,136 @@
               <a:blipFill>
                 <a:blip r:embed="rId12"/>
                 <a:stretch>
-                  <a:fillRect l="-651" t="-334" r="-1303" b="-669"/>
+                  <a:fillRect l="-651" t="-315" r="-1303" b="-946"/>
+                </a:stretch>
+              </a:blipFill>
+            </p:spPr>
+            <p:txBody>
+              <a:bodyPr/>
+              <a:lstStyle/>
+              <a:p>
+                <a:r>
+                  <a:rPr lang="en-US">
+                    <a:noFill/>
+                  </a:rPr>
+                  <a:t> </a:t>
+                </a:r>
+              </a:p>
+            </p:txBody>
+          </p:sp>
+        </mc:Fallback>
+      </mc:AlternateContent>
+      <mc:AlternateContent xmlns:mc="http://schemas.openxmlformats.org/markup-compatibility/2006">
+        <mc:Choice xmlns:a14="http://schemas.microsoft.com/office/drawing/2010/main" Requires="a14">
+          <p:sp>
+            <p:nvSpPr>
+              <p:cNvPr id="3" name="TextBox 2">
+                <a:extLst>
+                  <a:ext uri="{FF2B5EF4-FFF2-40B4-BE49-F238E27FC236}">
+                    <a16:creationId xmlns:a16="http://schemas.microsoft.com/office/drawing/2014/main" id="{F0DED72D-DE5F-F353-0923-7AE2A431BA63}"/>
+                  </a:ext>
+                </a:extLst>
+              </p:cNvPr>
+              <p:cNvSpPr txBox="1"/>
+              <p:nvPr/>
+            </p:nvSpPr>
+            <p:spPr>
+              <a:xfrm>
+                <a:off x="5363211" y="4992010"/>
+                <a:ext cx="810350" cy="415498"/>
+              </a:xfrm>
+              <a:prstGeom prst="rect">
+                <a:avLst/>
+              </a:prstGeom>
+              <a:noFill/>
+            </p:spPr>
+            <p:txBody>
+              <a:bodyPr wrap="none" rtlCol="0">
+                <a:spAutoFit/>
+              </a:bodyPr>
+              <a:lstStyle/>
+              <a:p>
+                <a:pPr/>
+                <a14:m>
+                  <m:oMathPara xmlns:m="http://schemas.openxmlformats.org/officeDocument/2006/math">
+                    <m:oMathParaPr>
+                      <m:jc m:val="centerGroup"/>
+                    </m:oMathParaPr>
+                    <m:oMath xmlns:m="http://schemas.openxmlformats.org/officeDocument/2006/math">
+                      <m:r>
+                        <m:rPr>
+                          <m:sty m:val="p"/>
+                        </m:rPr>
+                        <a:rPr lang="en-US" sz="2100" smtClean="0">
+                          <a:solidFill>
+                            <a:schemeClr val="accent1"/>
+                          </a:solidFill>
+                          <a:latin typeface="Cambria Math" panose="02040503050406030204" pitchFamily="18" charset="0"/>
+                        </a:rPr>
+                        <m:t>Θ</m:t>
+                      </m:r>
+                      <m:d>
+                        <m:dPr>
+                          <m:ctrlPr>
+                            <a:rPr lang="en-US" sz="2100" i="1">
+                              <a:solidFill>
+                                <a:schemeClr val="accent1"/>
+                              </a:solidFill>
+                              <a:latin typeface="Cambria Math" panose="02040503050406030204" pitchFamily="18" charset="0"/>
+                            </a:rPr>
+                          </m:ctrlPr>
+                        </m:dPr>
+                        <m:e>
+                          <m:r>
+                            <a:rPr lang="en-US" sz="2100" i="1">
+                              <a:solidFill>
+                                <a:schemeClr val="accent1"/>
+                              </a:solidFill>
+                              <a:latin typeface="Cambria Math" panose="02040503050406030204" pitchFamily="18" charset="0"/>
+                            </a:rPr>
+                            <m:t>𝑛</m:t>
+                          </m:r>
+                        </m:e>
+                      </m:d>
+                    </m:oMath>
+                  </m:oMathPara>
+                </a14:m>
+                <a:endParaRPr lang="en-US" sz="2100" dirty="0">
+                  <a:solidFill>
+                    <a:schemeClr val="accent1"/>
+                  </a:solidFill>
+                </a:endParaRPr>
+              </a:p>
+            </p:txBody>
+          </p:sp>
+        </mc:Choice>
+        <mc:Fallback>
+          <p:sp>
+            <p:nvSpPr>
+              <p:cNvPr id="3" name="TextBox 2">
+                <a:extLst>
+                  <a:ext uri="{FF2B5EF4-FFF2-40B4-BE49-F238E27FC236}">
+                    <a16:creationId xmlns:a16="http://schemas.microsoft.com/office/drawing/2014/main" id="{F0DED72D-DE5F-F353-0923-7AE2A431BA63}"/>
+                  </a:ext>
+                </a:extLst>
+              </p:cNvPr>
+              <p:cNvSpPr txBox="1">
+                <a:spLocks noRot="1" noChangeAspect="1" noMove="1" noResize="1" noEditPoints="1" noAdjustHandles="1" noChangeArrowheads="1" noChangeShapeType="1" noTextEdit="1"/>
+              </p:cNvSpPr>
+              <p:nvPr/>
+            </p:nvSpPr>
+            <p:spPr>
+              <a:xfrm>
+                <a:off x="5363211" y="4992010"/>
+                <a:ext cx="810350" cy="415498"/>
+              </a:xfrm>
+              <a:prstGeom prst="rect">
+                <a:avLst/>
+              </a:prstGeom>
+              <a:blipFill>
+                <a:blip r:embed="rId13"/>
+                <a:stretch>
+                  <a:fillRect/>
                 </a:stretch>
               </a:blipFill>
             </p:spPr>
